--- a/1.Design/jaejaePro_Design.pptx
+++ b/1.Design/jaejaePro_Design.pptx
@@ -7,6 +7,7 @@
   <p:sldIdLst>
     <p:sldId id="256" r:id="rId2"/>
     <p:sldId id="257" r:id="rId3"/>
+    <p:sldId id="258" r:id="rId4"/>
   </p:sldIdLst>
   <p:sldSz cx="12192000" cy="6858000"/>
   <p:notesSz cx="6858000" cy="9144000"/>
@@ -3341,7 +3342,7 @@
         </p:nvSpPr>
         <p:spPr>
           <a:xfrm>
-            <a:off x="9320289" y="302504"/>
+            <a:off x="9320289" y="2328527"/>
             <a:ext cx="2289936" cy="2002285"/>
           </a:xfrm>
           <a:prstGeom prst="can">
@@ -3376,18 +3377,13 @@
           <a:p>
             <a:pPr algn="ctr"/>
             <a:r>
-              <a:rPr lang="ko-KR" altLang="en-US">
+              <a:rPr lang="ko-KR" altLang="en-US" dirty="0">
                 <a:solidFill>
                   <a:schemeClr val="tx1"/>
                 </a:solidFill>
               </a:rPr>
               <a:t>데이터 베이스</a:t>
             </a:r>
-            <a:endParaRPr lang="ko-KR" altLang="en-US" dirty="0">
-              <a:solidFill>
-                <a:schemeClr val="tx1"/>
-              </a:solidFill>
-            </a:endParaRPr>
           </a:p>
         </p:txBody>
       </p:sp>
@@ -3548,6 +3544,7 @@
             <a:chOff x="2871711" y="302504"/>
             <a:chExt cx="5862181" cy="5862180"/>
           </a:xfrm>
+          <a:noFill/>
         </p:grpSpPr>
         <p:sp>
           <p:nvSpPr>
@@ -3569,6 +3566,7 @@
             <a:prstGeom prst="rect">
               <a:avLst/>
             </a:prstGeom>
+            <a:grpFill/>
           </p:spPr>
           <p:style>
             <a:lnRef idx="2">
@@ -3609,14 +3607,17 @@
           </p:nvSpPr>
           <p:spPr>
             <a:xfrm>
-              <a:off x="3208930" y="1078066"/>
+              <a:off x="3143109" y="1093716"/>
               <a:ext cx="5187743" cy="663879"/>
             </a:xfrm>
             <a:prstGeom prst="rect">
               <a:avLst/>
             </a:prstGeom>
             <a:solidFill>
-              <a:srgbClr val="92D050"/>
+              <a:schemeClr val="accent2">
+                <a:lumMod val="60000"/>
+                <a:lumOff val="40000"/>
+              </a:schemeClr>
             </a:solidFill>
           </p:spPr>
           <p:style>
@@ -3640,7 +3641,11 @@
             <a:lstStyle/>
             <a:p>
               <a:pPr algn="ctr"/>
-              <a:endParaRPr lang="ko-KR" altLang="en-US"/>
+              <a:r>
+                <a:rPr lang="en-US" altLang="ko-KR" dirty="0"/>
+                <a:t>Controller</a:t>
+              </a:r>
+              <a:endParaRPr lang="ko-KR" altLang="en-US" dirty="0"/>
             </a:p>
           </p:txBody>
         </p:sp>
@@ -3658,14 +3663,17 @@
           </p:nvSpPr>
           <p:spPr>
             <a:xfrm>
-              <a:off x="3208930" y="2082236"/>
+              <a:off x="3143109" y="2097886"/>
               <a:ext cx="5187743" cy="663879"/>
             </a:xfrm>
             <a:prstGeom prst="rect">
               <a:avLst/>
             </a:prstGeom>
             <a:solidFill>
-              <a:srgbClr val="92D050"/>
+              <a:schemeClr val="accent2">
+                <a:lumMod val="60000"/>
+                <a:lumOff val="40000"/>
+              </a:schemeClr>
             </a:solidFill>
           </p:spPr>
           <p:style>
@@ -3689,7 +3697,11 @@
             <a:lstStyle/>
             <a:p>
               <a:pPr algn="ctr"/>
-              <a:endParaRPr lang="ko-KR" altLang="en-US"/>
+              <a:r>
+                <a:rPr lang="en-US" altLang="ko-KR" dirty="0"/>
+                <a:t>Interface</a:t>
+              </a:r>
+              <a:endParaRPr lang="ko-KR" altLang="en-US" dirty="0"/>
             </a:p>
           </p:txBody>
         </p:sp>
@@ -3707,14 +3719,17 @@
           </p:nvSpPr>
           <p:spPr>
             <a:xfrm>
-              <a:off x="3208930" y="3161770"/>
+              <a:off x="3143109" y="3177420"/>
               <a:ext cx="5187743" cy="663879"/>
             </a:xfrm>
             <a:prstGeom prst="rect">
               <a:avLst/>
             </a:prstGeom>
             <a:solidFill>
-              <a:srgbClr val="92D050"/>
+              <a:schemeClr val="accent2">
+                <a:lumMod val="60000"/>
+                <a:lumOff val="40000"/>
+              </a:schemeClr>
             </a:solidFill>
           </p:spPr>
           <p:style>
@@ -3738,99 +3753,71 @@
             <a:lstStyle/>
             <a:p>
               <a:pPr algn="ctr"/>
-              <a:endParaRPr lang="ko-KR" altLang="en-US"/>
-            </a:p>
-          </p:txBody>
-        </p:sp>
-        <p:sp>
-          <p:nvSpPr>
-            <p:cNvPr id="13" name="직사각형 12">
-              <a:extLst>
-                <a:ext uri="{FF2B5EF4-FFF2-40B4-BE49-F238E27FC236}">
-                  <a16:creationId xmlns:a16="http://schemas.microsoft.com/office/drawing/2014/main" id="{1B447FA5-F050-4407-90ED-F60A5F386F4A}"/>
-                </a:ext>
-              </a:extLst>
-            </p:cNvPr>
-            <p:cNvSpPr/>
-            <p:nvPr/>
-          </p:nvSpPr>
-          <p:spPr>
-            <a:xfrm>
-              <a:off x="3208929" y="4149246"/>
-              <a:ext cx="5187743" cy="663879"/>
-            </a:xfrm>
-            <a:prstGeom prst="rect">
-              <a:avLst/>
-            </a:prstGeom>
-            <a:solidFill>
-              <a:srgbClr val="92D050"/>
-            </a:solidFill>
-          </p:spPr>
-          <p:style>
-            <a:lnRef idx="2">
-              <a:schemeClr val="accent1">
-                <a:shade val="50000"/>
-              </a:schemeClr>
-            </a:lnRef>
-            <a:fillRef idx="1">
-              <a:schemeClr val="accent1"/>
-            </a:fillRef>
-            <a:effectRef idx="0">
-              <a:schemeClr val="accent1"/>
-            </a:effectRef>
-            <a:fontRef idx="minor">
-              <a:schemeClr val="lt1"/>
-            </a:fontRef>
-          </p:style>
-          <p:txBody>
-            <a:bodyPr rtlCol="0" anchor="ctr"/>
-            <a:lstStyle/>
-            <a:p>
-              <a:pPr algn="ctr"/>
-              <a:endParaRPr lang="ko-KR" altLang="en-US"/>
+              <a:r>
+                <a:rPr lang="en-US" altLang="ko-KR" dirty="0"/>
+                <a:t>Service</a:t>
+              </a:r>
+              <a:endParaRPr lang="ko-KR" altLang="en-US" dirty="0"/>
             </a:p>
           </p:txBody>
         </p:sp>
       </p:grpSp>
-      <p:pic>
-        <p:nvPicPr>
-          <p:cNvPr id="15" name="그래픽 14" descr="스마트폰 단색으로 채워진">
-            <a:extLst>
-              <a:ext uri="{FF2B5EF4-FFF2-40B4-BE49-F238E27FC236}">
-                <a16:creationId xmlns:a16="http://schemas.microsoft.com/office/drawing/2014/main" id="{B6216F74-540D-4044-BC69-F7964DEB85AD}"/>
-              </a:ext>
-            </a:extLst>
-          </p:cNvPr>
-          <p:cNvPicPr>
-            <a:picLocks noChangeAspect="1"/>
-          </p:cNvPicPr>
+      <p:sp>
+        <p:nvSpPr>
+          <p:cNvPr id="20" name="직사각형 19">
+            <a:extLst>
+              <a:ext uri="{FF2B5EF4-FFF2-40B4-BE49-F238E27FC236}">
+                <a16:creationId xmlns:a16="http://schemas.microsoft.com/office/drawing/2014/main" id="{3FD9B67A-BA17-4BC0-8831-1513B84D9C8B}"/>
+              </a:ext>
+            </a:extLst>
+          </p:cNvPr>
+          <p:cNvSpPr/>
           <p:nvPr/>
-        </p:nvPicPr>
-        <p:blipFill>
-          <a:blip r:embed="rId4">
-            <a:extLst>
-              <a:ext uri="{28A0092B-C50C-407E-A947-70E740481C1C}">
-                <a14:useLocalDpi xmlns:a14="http://schemas.microsoft.com/office/drawing/2010/main" val="0"/>
-              </a:ext>
-              <a:ext uri="{96DAC541-7B7A-43D3-8B79-37D633B846F1}">
-                <asvg:svgBlip xmlns:asvg="http://schemas.microsoft.com/office/drawing/2016/SVG/main" r:embed="rId5"/>
-              </a:ext>
-            </a:extLst>
-          </a:blip>
-          <a:stretch>
-            <a:fillRect/>
-          </a:stretch>
-        </p:blipFill>
+        </p:nvSpPr>
         <p:spPr>
           <a:xfrm>
-            <a:off x="9071110" y="3028077"/>
-            <a:ext cx="2841141" cy="3185995"/>
+            <a:off x="3208929" y="4898643"/>
+            <a:ext cx="5187743" cy="663879"/>
           </a:xfrm>
           <a:prstGeom prst="rect">
             <a:avLst/>
           </a:prstGeom>
+          <a:solidFill>
+            <a:schemeClr val="accent2">
+              <a:lumMod val="60000"/>
+              <a:lumOff val="40000"/>
+            </a:schemeClr>
+          </a:solidFill>
         </p:spPr>
-      </p:pic>
+        <p:style>
+          <a:lnRef idx="2">
+            <a:schemeClr val="accent1">
+              <a:shade val="50000"/>
+            </a:schemeClr>
+          </a:lnRef>
+          <a:fillRef idx="1">
+            <a:schemeClr val="accent1"/>
+          </a:fillRef>
+          <a:effectRef idx="0">
+            <a:schemeClr val="accent1"/>
+          </a:effectRef>
+          <a:fontRef idx="minor">
+            <a:schemeClr val="lt1"/>
+          </a:fontRef>
+        </p:style>
+        <p:txBody>
+          <a:bodyPr rtlCol="0" anchor="ctr"/>
+          <a:lstStyle/>
+          <a:p>
+            <a:pPr algn="ctr"/>
+            <a:r>
+              <a:rPr lang="en-US" altLang="ko-KR" dirty="0"/>
+              <a:t>DB Context</a:t>
+            </a:r>
+            <a:endParaRPr lang="ko-KR" altLang="en-US" dirty="0"/>
+          </a:p>
+        </p:txBody>
+      </p:sp>
     </p:spTree>
     <p:extLst>
       <p:ext uri="{BB962C8B-B14F-4D97-AF65-F5344CB8AC3E}">
@@ -3861,10 +3848,948 @@
           <a:chExt cx="0" cy="0"/>
         </a:xfrm>
       </p:grpSpPr>
+      <p:pic>
+        <p:nvPicPr>
+          <p:cNvPr id="3" name="그래픽 2" descr="세계 단색으로 채워진">
+            <a:extLst>
+              <a:ext uri="{FF2B5EF4-FFF2-40B4-BE49-F238E27FC236}">
+                <a16:creationId xmlns:a16="http://schemas.microsoft.com/office/drawing/2014/main" id="{1EECA4D4-34AB-4AE2-B008-CDEA37DDFF44}"/>
+              </a:ext>
+            </a:extLst>
+          </p:cNvPr>
+          <p:cNvPicPr>
+            <a:picLocks noChangeAspect="1"/>
+          </p:cNvPicPr>
+          <p:nvPr/>
+        </p:nvPicPr>
+        <p:blipFill>
+          <a:blip r:embed="rId2">
+            <a:extLst>
+              <a:ext uri="{28A0092B-C50C-407E-A947-70E740481C1C}">
+                <a14:useLocalDpi xmlns:a14="http://schemas.microsoft.com/office/drawing/2010/main" val="0"/>
+              </a:ext>
+              <a:ext uri="{96DAC541-7B7A-43D3-8B79-37D633B846F1}">
+                <asvg:svgBlip xmlns:asvg="http://schemas.microsoft.com/office/drawing/2016/SVG/main" r:embed="rId3"/>
+              </a:ext>
+            </a:extLst>
+          </a:blip>
+          <a:stretch>
+            <a:fillRect/>
+          </a:stretch>
+        </p:blipFill>
+        <p:spPr>
+          <a:xfrm>
+            <a:off x="3806875" y="2921045"/>
+            <a:ext cx="1969746" cy="2071255"/>
+          </a:xfrm>
+          <a:prstGeom prst="rect">
+            <a:avLst/>
+          </a:prstGeom>
+        </p:spPr>
+      </p:pic>
+      <p:pic>
+        <p:nvPicPr>
+          <p:cNvPr id="5" name="그래픽 4" descr="세계 윤곽선">
+            <a:extLst>
+              <a:ext uri="{FF2B5EF4-FFF2-40B4-BE49-F238E27FC236}">
+                <a16:creationId xmlns:a16="http://schemas.microsoft.com/office/drawing/2014/main" id="{D4376F62-E85B-4B14-B64F-1B7486D040E4}"/>
+              </a:ext>
+            </a:extLst>
+          </p:cNvPr>
+          <p:cNvPicPr>
+            <a:picLocks noChangeAspect="1"/>
+          </p:cNvPicPr>
+          <p:nvPr/>
+        </p:nvPicPr>
+        <p:blipFill>
+          <a:blip r:embed="rId4">
+            <a:extLst>
+              <a:ext uri="{28A0092B-C50C-407E-A947-70E740481C1C}">
+                <a14:useLocalDpi xmlns:a14="http://schemas.microsoft.com/office/drawing/2010/main" val="0"/>
+              </a:ext>
+              <a:ext uri="{96DAC541-7B7A-43D3-8B79-37D633B846F1}">
+                <asvg:svgBlip xmlns:asvg="http://schemas.microsoft.com/office/drawing/2016/SVG/main" r:embed="rId5"/>
+              </a:ext>
+            </a:extLst>
+          </a:blip>
+          <a:stretch>
+            <a:fillRect/>
+          </a:stretch>
+        </p:blipFill>
+        <p:spPr>
+          <a:xfrm>
+            <a:off x="929657" y="2971800"/>
+            <a:ext cx="1969746" cy="1969746"/>
+          </a:xfrm>
+          <a:prstGeom prst="rect">
+            <a:avLst/>
+          </a:prstGeom>
+        </p:spPr>
+      </p:pic>
+      <p:pic>
+        <p:nvPicPr>
+          <p:cNvPr id="7" name="그래픽 6" descr="인터넷 단색으로 채워진">
+            <a:extLst>
+              <a:ext uri="{FF2B5EF4-FFF2-40B4-BE49-F238E27FC236}">
+                <a16:creationId xmlns:a16="http://schemas.microsoft.com/office/drawing/2014/main" id="{B344AAAF-2DF1-412F-995C-B5B19F00D8C0}"/>
+              </a:ext>
+            </a:extLst>
+          </p:cNvPr>
+          <p:cNvPicPr>
+            <a:picLocks noChangeAspect="1"/>
+          </p:cNvPicPr>
+          <p:nvPr/>
+        </p:nvPicPr>
+        <p:blipFill>
+          <a:blip r:embed="rId6">
+            <a:extLst>
+              <a:ext uri="{28A0092B-C50C-407E-A947-70E740481C1C}">
+                <a14:useLocalDpi xmlns:a14="http://schemas.microsoft.com/office/drawing/2010/main" val="0"/>
+              </a:ext>
+              <a:ext uri="{96DAC541-7B7A-43D3-8B79-37D633B846F1}">
+                <asvg:svgBlip xmlns:asvg="http://schemas.microsoft.com/office/drawing/2016/SVG/main" r:embed="rId7"/>
+              </a:ext>
+            </a:extLst>
+          </a:blip>
+          <a:stretch>
+            <a:fillRect/>
+          </a:stretch>
+        </p:blipFill>
+        <p:spPr>
+          <a:xfrm>
+            <a:off x="3071770" y="16164"/>
+            <a:ext cx="3412836" cy="3412836"/>
+          </a:xfrm>
+          <a:prstGeom prst="rect">
+            <a:avLst/>
+          </a:prstGeom>
+        </p:spPr>
+      </p:pic>
+      <p:sp>
+        <p:nvSpPr>
+          <p:cNvPr id="8" name="TextBox 7">
+            <a:extLst>
+              <a:ext uri="{FF2B5EF4-FFF2-40B4-BE49-F238E27FC236}">
+                <a16:creationId xmlns:a16="http://schemas.microsoft.com/office/drawing/2014/main" id="{57E2F85F-22FD-4946-ABFA-FFA3E75ED052}"/>
+              </a:ext>
+            </a:extLst>
+          </p:cNvPr>
+          <p:cNvSpPr txBox="1"/>
+          <p:nvPr/>
+        </p:nvSpPr>
+        <p:spPr>
+          <a:xfrm>
+            <a:off x="603305" y="4992300"/>
+            <a:ext cx="2622449" cy="646331"/>
+          </a:xfrm>
+          <a:prstGeom prst="rect">
+            <a:avLst/>
+          </a:prstGeom>
+          <a:noFill/>
+        </p:spPr>
+        <p:txBody>
+          <a:bodyPr wrap="none" rtlCol="0">
+            <a:spAutoFit/>
+          </a:bodyPr>
+          <a:lstStyle/>
+          <a:p>
+            <a:pPr algn="ctr"/>
+            <a:r>
+              <a:rPr lang="ko-KR" altLang="en-US" dirty="0"/>
+              <a:t>가장 기본 </a:t>
+            </a:r>
+            <a:r>
+              <a:rPr lang="en-US" altLang="ko-KR" dirty="0" err="1"/>
+              <a:t>c#</a:t>
+            </a:r>
+            <a:r>
+              <a:rPr lang="en-US" altLang="ko-KR" dirty="0"/>
+              <a:t> MVC+EF6</a:t>
+            </a:r>
+          </a:p>
+          <a:p>
+            <a:pPr algn="ctr"/>
+            <a:r>
+              <a:rPr lang="en-US" altLang="ko-KR" dirty="0"/>
+              <a:t>(.</a:t>
+            </a:r>
+            <a:r>
+              <a:rPr lang="en-US" altLang="ko-KR" dirty="0" err="1"/>
+              <a:t>cshtml+MVC</a:t>
+            </a:r>
+            <a:r>
+              <a:rPr lang="en-US" altLang="ko-KR" dirty="0"/>
+              <a:t>)</a:t>
+            </a:r>
+            <a:endParaRPr lang="ko-KR" altLang="en-US" dirty="0"/>
+          </a:p>
+        </p:txBody>
+      </p:sp>
+      <p:sp>
+        <p:nvSpPr>
+          <p:cNvPr id="9" name="TextBox 8">
+            <a:extLst>
+              <a:ext uri="{FF2B5EF4-FFF2-40B4-BE49-F238E27FC236}">
+                <a16:creationId xmlns:a16="http://schemas.microsoft.com/office/drawing/2014/main" id="{ACC9F09A-7CB6-4131-BE1B-39AB3E77D087}"/>
+              </a:ext>
+            </a:extLst>
+          </p:cNvPr>
+          <p:cNvSpPr txBox="1"/>
+          <p:nvPr/>
+        </p:nvSpPr>
+        <p:spPr>
+          <a:xfrm>
+            <a:off x="3582923" y="4992300"/>
+            <a:ext cx="2417650" cy="646331"/>
+          </a:xfrm>
+          <a:prstGeom prst="rect">
+            <a:avLst/>
+          </a:prstGeom>
+          <a:noFill/>
+        </p:spPr>
+        <p:txBody>
+          <a:bodyPr wrap="none" rtlCol="0">
+            <a:spAutoFit/>
+          </a:bodyPr>
+          <a:lstStyle/>
+          <a:p>
+            <a:pPr algn="ctr"/>
+            <a:r>
+              <a:rPr lang="en-US" altLang="ko-KR" dirty="0" err="1"/>
+              <a:t>c#</a:t>
+            </a:r>
+            <a:r>
+              <a:rPr lang="en-US" altLang="ko-KR" dirty="0"/>
+              <a:t> </a:t>
+            </a:r>
+            <a:r>
+              <a:rPr lang="en-US" altLang="ko-KR" dirty="0" err="1"/>
+              <a:t>ASP.Net</a:t>
+            </a:r>
+            <a:r>
+              <a:rPr lang="en-US" altLang="ko-KR" dirty="0"/>
+              <a:t> MVC+EF6</a:t>
+            </a:r>
+          </a:p>
+          <a:p>
+            <a:pPr algn="ctr"/>
+            <a:r>
+              <a:rPr lang="en-US" altLang="ko-KR" dirty="0"/>
+              <a:t>(.</a:t>
+            </a:r>
+            <a:r>
+              <a:rPr lang="en-US" altLang="ko-KR" dirty="0" err="1"/>
+              <a:t>aspx+MVC</a:t>
+            </a:r>
+            <a:r>
+              <a:rPr lang="en-US" altLang="ko-KR" dirty="0"/>
+              <a:t>)</a:t>
+            </a:r>
+            <a:endParaRPr lang="ko-KR" altLang="en-US" dirty="0"/>
+          </a:p>
+        </p:txBody>
+      </p:sp>
+      <p:pic>
+        <p:nvPicPr>
+          <p:cNvPr id="11" name="그래픽 10" descr="세계 윤곽선">
+            <a:extLst>
+              <a:ext uri="{FF2B5EF4-FFF2-40B4-BE49-F238E27FC236}">
+                <a16:creationId xmlns:a16="http://schemas.microsoft.com/office/drawing/2014/main" id="{CCAE0B82-61EF-43A1-A9E0-A92179A36AE9}"/>
+              </a:ext>
+            </a:extLst>
+          </p:cNvPr>
+          <p:cNvPicPr>
+            <a:picLocks noChangeAspect="1"/>
+          </p:cNvPicPr>
+          <p:nvPr/>
+        </p:nvPicPr>
+        <p:blipFill>
+          <a:blip r:embed="rId4">
+            <a:extLst>
+              <a:ext uri="{28A0092B-C50C-407E-A947-70E740481C1C}">
+                <a14:useLocalDpi xmlns:a14="http://schemas.microsoft.com/office/drawing/2010/main" val="0"/>
+              </a:ext>
+              <a:ext uri="{96DAC541-7B7A-43D3-8B79-37D633B846F1}">
+                <asvg:svgBlip xmlns:asvg="http://schemas.microsoft.com/office/drawing/2016/SVG/main" r:embed="rId5"/>
+              </a:ext>
+            </a:extLst>
+          </a:blip>
+          <a:stretch>
+            <a:fillRect/>
+          </a:stretch>
+        </p:blipFill>
+        <p:spPr>
+          <a:xfrm>
+            <a:off x="6558154" y="2921045"/>
+            <a:ext cx="1969746" cy="1969746"/>
+          </a:xfrm>
+          <a:prstGeom prst="rect">
+            <a:avLst/>
+          </a:prstGeom>
+        </p:spPr>
+      </p:pic>
+      <p:sp>
+        <p:nvSpPr>
+          <p:cNvPr id="12" name="TextBox 11">
+            <a:extLst>
+              <a:ext uri="{FF2B5EF4-FFF2-40B4-BE49-F238E27FC236}">
+                <a16:creationId xmlns:a16="http://schemas.microsoft.com/office/drawing/2014/main" id="{6A56C5B0-4943-4F6D-9EE8-B266F36435F6}"/>
+              </a:ext>
+            </a:extLst>
+          </p:cNvPr>
+          <p:cNvSpPr txBox="1"/>
+          <p:nvPr/>
+        </p:nvSpPr>
+        <p:spPr>
+          <a:xfrm>
+            <a:off x="6424997" y="4992300"/>
+            <a:ext cx="2236061" cy="369332"/>
+          </a:xfrm>
+          <a:prstGeom prst="rect">
+            <a:avLst/>
+          </a:prstGeom>
+          <a:noFill/>
+        </p:spPr>
+        <p:txBody>
+          <a:bodyPr wrap="none" rtlCol="0">
+            <a:spAutoFit/>
+          </a:bodyPr>
+          <a:lstStyle/>
+          <a:p>
+            <a:pPr algn="ctr"/>
+            <a:r>
+              <a:rPr lang="en-US" altLang="ko-KR" dirty="0"/>
+              <a:t>Spring MVC Project</a:t>
+            </a:r>
+            <a:endParaRPr lang="ko-KR" altLang="en-US" dirty="0"/>
+          </a:p>
+        </p:txBody>
+      </p:sp>
+      <p:pic>
+        <p:nvPicPr>
+          <p:cNvPr id="13" name="그래픽 12" descr="스마트폰 단색으로 채워진">
+            <a:extLst>
+              <a:ext uri="{FF2B5EF4-FFF2-40B4-BE49-F238E27FC236}">
+                <a16:creationId xmlns:a16="http://schemas.microsoft.com/office/drawing/2014/main" id="{A5F31306-A94A-4992-B934-89807B8F4E56}"/>
+              </a:ext>
+            </a:extLst>
+          </p:cNvPr>
+          <p:cNvPicPr>
+            <a:picLocks noChangeAspect="1"/>
+          </p:cNvPicPr>
+          <p:nvPr/>
+        </p:nvPicPr>
+        <p:blipFill>
+          <a:blip r:embed="rId8">
+            <a:extLst>
+              <a:ext uri="{28A0092B-C50C-407E-A947-70E740481C1C}">
+                <a14:useLocalDpi xmlns:a14="http://schemas.microsoft.com/office/drawing/2010/main" val="0"/>
+              </a:ext>
+              <a:ext uri="{96DAC541-7B7A-43D3-8B79-37D633B846F1}">
+                <asvg:svgBlip xmlns:asvg="http://schemas.microsoft.com/office/drawing/2016/SVG/main" r:embed="rId9"/>
+              </a:ext>
+            </a:extLst>
+          </a:blip>
+          <a:stretch>
+            <a:fillRect/>
+          </a:stretch>
+        </p:blipFill>
+        <p:spPr>
+          <a:xfrm rot="10800000">
+            <a:off x="8771790" y="1070874"/>
+            <a:ext cx="3420210" cy="3819917"/>
+          </a:xfrm>
+          <a:prstGeom prst="rect">
+            <a:avLst/>
+          </a:prstGeom>
+        </p:spPr>
+      </p:pic>
     </p:spTree>
     <p:extLst>
       <p:ext uri="{BB962C8B-B14F-4D97-AF65-F5344CB8AC3E}">
         <p14:creationId xmlns:p14="http://schemas.microsoft.com/office/powerpoint/2010/main" val="2387028300"/>
+      </p:ext>
+    </p:extLst>
+  </p:cSld>
+  <p:clrMapOvr>
+    <a:masterClrMapping/>
+  </p:clrMapOvr>
+</p:sld>
+</file>
+
+<file path=ppt/slides/slide3.xml><?xml version="1.0" encoding="utf-8"?>
+<p:sld xmlns:a="http://schemas.openxmlformats.org/drawingml/2006/main" xmlns:r="http://schemas.openxmlformats.org/officeDocument/2006/relationships" xmlns:p="http://schemas.openxmlformats.org/presentationml/2006/main">
+  <p:cSld>
+    <p:spTree>
+      <p:nvGrpSpPr>
+        <p:cNvPr id="1" name=""/>
+        <p:cNvGrpSpPr/>
+        <p:nvPr/>
+      </p:nvGrpSpPr>
+      <p:grpSpPr>
+        <a:xfrm>
+          <a:off x="0" y="0"/>
+          <a:ext cx="0" cy="0"/>
+          <a:chOff x="0" y="0"/>
+          <a:chExt cx="0" cy="0"/>
+        </a:xfrm>
+      </p:grpSpPr>
+      <p:graphicFrame>
+        <p:nvGraphicFramePr>
+          <p:cNvPr id="2" name="표 2">
+            <a:extLst>
+              <a:ext uri="{FF2B5EF4-FFF2-40B4-BE49-F238E27FC236}">
+                <a16:creationId xmlns:a16="http://schemas.microsoft.com/office/drawing/2014/main" id="{861E305B-D171-4E37-AB94-905916C211A5}"/>
+              </a:ext>
+            </a:extLst>
+          </p:cNvPr>
+          <p:cNvGraphicFramePr>
+            <a:graphicFrameLocks noGrp="1"/>
+          </p:cNvGraphicFramePr>
+          <p:nvPr>
+            <p:extLst>
+              <p:ext uri="{D42A27DB-BD31-4B8C-83A1-F6EECF244321}">
+                <p14:modId xmlns:p14="http://schemas.microsoft.com/office/powerpoint/2010/main" val="4036464847"/>
+              </p:ext>
+            </p:extLst>
+          </p:nvPr>
+        </p:nvGraphicFramePr>
+        <p:xfrm>
+          <a:off x="3811649" y="916540"/>
+          <a:ext cx="2046941" cy="5024919"/>
+        </p:xfrm>
+        <a:graphic>
+          <a:graphicData uri="http://schemas.openxmlformats.org/drawingml/2006/table">
+            <a:tbl>
+              <a:tblPr firstRow="1" bandRow="1">
+                <a:tableStyleId>{5C22544A-7EE6-4342-B048-85BDC9FD1C3A}</a:tableStyleId>
+              </a:tblPr>
+              <a:tblGrid>
+                <a:gridCol w="2046941">
+                  <a:extLst>
+                    <a:ext uri="{9D8B030D-6E8A-4147-A177-3AD203B41FA5}">
+                      <a16:colId xmlns:a16="http://schemas.microsoft.com/office/drawing/2014/main" val="1198671097"/>
+                    </a:ext>
+                  </a:extLst>
+                </a:gridCol>
+              </a:tblGrid>
+              <a:tr h="544359">
+                <a:tc>
+                  <a:txBody>
+                    <a:bodyPr/>
+                    <a:lstStyle/>
+                    <a:p>
+                      <a:pPr algn="ctr" latinLnBrk="1"/>
+                      <a:r>
+                        <a:rPr lang="en-US" altLang="ko-KR" dirty="0" err="1"/>
+                        <a:t>userTB</a:t>
+                      </a:r>
+                      <a:endParaRPr lang="ko-KR" altLang="en-US" dirty="0"/>
+                    </a:p>
+                  </a:txBody>
+                  <a:tcPr anchor="ctr"/>
+                </a:tc>
+                <a:extLst>
+                  <a:ext uri="{0D108BD9-81ED-4DB2-BD59-A6C34878D82A}">
+                    <a16:rowId xmlns:a16="http://schemas.microsoft.com/office/drawing/2014/main" val="972086059"/>
+                  </a:ext>
+                </a:extLst>
+              </a:tr>
+              <a:tr h="1549650">
+                <a:tc>
+                  <a:txBody>
+                    <a:bodyPr/>
+                    <a:lstStyle/>
+                    <a:p>
+                      <a:pPr algn="l" latinLnBrk="1"/>
+                      <a:r>
+                        <a:rPr lang="en-US" altLang="ko-KR" b="1" dirty="0">
+                          <a:solidFill>
+                            <a:srgbClr val="FF0000"/>
+                          </a:solidFill>
+                        </a:rPr>
+                        <a:t>UKID</a:t>
+                      </a:r>
+                    </a:p>
+                    <a:p>
+                      <a:pPr algn="l" latinLnBrk="1"/>
+                      <a:r>
+                        <a:rPr lang="en-US" altLang="ko-KR" b="1" dirty="0">
+                          <a:solidFill>
+                            <a:schemeClr val="accent6">
+                              <a:lumMod val="75000"/>
+                            </a:schemeClr>
+                          </a:solidFill>
+                        </a:rPr>
+                        <a:t>USERID</a:t>
+                      </a:r>
+                    </a:p>
+                    <a:p>
+                      <a:pPr algn="l" latinLnBrk="1"/>
+                      <a:r>
+                        <a:rPr lang="en-US" altLang="ko-KR" dirty="0"/>
+                        <a:t>USERPASS</a:t>
+                      </a:r>
+                    </a:p>
+                    <a:p>
+                      <a:pPr algn="l" latinLnBrk="1"/>
+                      <a:r>
+                        <a:rPr lang="en-US" altLang="ko-KR" b="1" dirty="0">
+                          <a:solidFill>
+                            <a:srgbClr val="0000FF"/>
+                          </a:solidFill>
+                        </a:rPr>
+                        <a:t>USERTYPECD</a:t>
+                      </a:r>
+                    </a:p>
+                    <a:p>
+                      <a:pPr algn="l" latinLnBrk="1"/>
+                      <a:r>
+                        <a:rPr lang="en-US" altLang="ko-KR" b="1" dirty="0">
+                          <a:solidFill>
+                            <a:srgbClr val="0000FF"/>
+                          </a:solidFill>
+                        </a:rPr>
+                        <a:t>AUTHTYPE</a:t>
+                      </a:r>
+                    </a:p>
+                    <a:p>
+                      <a:pPr algn="l" latinLnBrk="1"/>
+                      <a:r>
+                        <a:rPr lang="en-US" altLang="ko-KR" b="1" dirty="0">
+                          <a:solidFill>
+                            <a:srgbClr val="0000FF"/>
+                          </a:solidFill>
+                        </a:rPr>
+                        <a:t>OFFICETEL1</a:t>
+                      </a:r>
+                    </a:p>
+                    <a:p>
+                      <a:pPr algn="l" latinLnBrk="1"/>
+                      <a:r>
+                        <a:rPr lang="en-US" altLang="ko-KR" dirty="0"/>
+                        <a:t>:</a:t>
+                      </a:r>
+                    </a:p>
+                    <a:p>
+                      <a:pPr algn="l" latinLnBrk="1"/>
+                      <a:r>
+                        <a:rPr lang="en-US" altLang="ko-KR" b="1" dirty="0">
+                          <a:solidFill>
+                            <a:srgbClr val="0000FF"/>
+                          </a:solidFill>
+                        </a:rPr>
+                        <a:t>CELLNO1</a:t>
+                      </a:r>
+                    </a:p>
+                    <a:p>
+                      <a:pPr algn="l" latinLnBrk="1"/>
+                      <a:r>
+                        <a:rPr lang="en-US" altLang="ko-KR" dirty="0"/>
+                        <a:t>:</a:t>
+                      </a:r>
+                    </a:p>
+                    <a:p>
+                      <a:pPr algn="l" latinLnBrk="1"/>
+                      <a:r>
+                        <a:rPr lang="en-US" altLang="ko-KR" b="1" dirty="0">
+                          <a:solidFill>
+                            <a:srgbClr val="0000FF"/>
+                          </a:solidFill>
+                        </a:rPr>
+                        <a:t>ORGNM</a:t>
+                      </a:r>
+                    </a:p>
+                    <a:p>
+                      <a:pPr algn="l" latinLnBrk="1"/>
+                      <a:r>
+                        <a:rPr lang="en-US" altLang="ko-KR" b="1" dirty="0">
+                          <a:solidFill>
+                            <a:srgbClr val="0000FF"/>
+                          </a:solidFill>
+                        </a:rPr>
+                        <a:t>DIVISONNM</a:t>
+                      </a:r>
+                    </a:p>
+                    <a:p>
+                      <a:pPr algn="l" latinLnBrk="1"/>
+                      <a:r>
+                        <a:rPr lang="en-US" altLang="ko-KR" dirty="0"/>
+                        <a:t>:</a:t>
+                      </a:r>
+                    </a:p>
+                    <a:p>
+                      <a:pPr algn="l" latinLnBrk="1"/>
+                      <a:r>
+                        <a:rPr lang="en-US" altLang="ko-KR" b="1" dirty="0">
+                          <a:solidFill>
+                            <a:srgbClr val="0000FF"/>
+                          </a:solidFill>
+                        </a:rPr>
+                        <a:t>APPTYPE</a:t>
+                      </a:r>
+                    </a:p>
+                    <a:p>
+                      <a:pPr algn="l" latinLnBrk="1"/>
+                      <a:r>
+                        <a:rPr lang="en-US" altLang="ko-KR" dirty="0"/>
+                        <a:t>:</a:t>
+                      </a:r>
+                    </a:p>
+                    <a:p>
+                      <a:pPr algn="l" latinLnBrk="1"/>
+                      <a:r>
+                        <a:rPr lang="en-US" altLang="ko-KR" b="1" dirty="0">
+                          <a:solidFill>
+                            <a:srgbClr val="0000FF"/>
+                          </a:solidFill>
+                        </a:rPr>
+                        <a:t>GENDERCD</a:t>
+                      </a:r>
+                    </a:p>
+                    <a:p>
+                      <a:pPr algn="l" latinLnBrk="1"/>
+                      <a:r>
+                        <a:rPr lang="en-US" altLang="ko-KR" dirty="0"/>
+                        <a:t>:</a:t>
+                      </a:r>
+                      <a:endParaRPr lang="ko-KR" altLang="en-US" dirty="0"/>
+                    </a:p>
+                  </a:txBody>
+                  <a:tcPr anchor="ctr"/>
+                </a:tc>
+                <a:extLst>
+                  <a:ext uri="{0D108BD9-81ED-4DB2-BD59-A6C34878D82A}">
+                    <a16:rowId xmlns:a16="http://schemas.microsoft.com/office/drawing/2014/main" val="1592556911"/>
+                  </a:ext>
+                </a:extLst>
+              </a:tr>
+            </a:tbl>
+          </a:graphicData>
+        </a:graphic>
+      </p:graphicFrame>
+      <p:graphicFrame>
+        <p:nvGraphicFramePr>
+          <p:cNvPr id="3" name="표 2">
+            <a:extLst>
+              <a:ext uri="{FF2B5EF4-FFF2-40B4-BE49-F238E27FC236}">
+                <a16:creationId xmlns:a16="http://schemas.microsoft.com/office/drawing/2014/main" id="{A4C43E53-7A7C-4335-88AA-2B673FA9A394}"/>
+              </a:ext>
+            </a:extLst>
+          </p:cNvPr>
+          <p:cNvGraphicFramePr>
+            <a:graphicFrameLocks noGrp="1"/>
+          </p:cNvGraphicFramePr>
+          <p:nvPr>
+            <p:extLst>
+              <p:ext uri="{D42A27DB-BD31-4B8C-83A1-F6EECF244321}">
+                <p14:modId xmlns:p14="http://schemas.microsoft.com/office/powerpoint/2010/main" val="3764150964"/>
+              </p:ext>
+            </p:extLst>
+          </p:nvPr>
+        </p:nvGraphicFramePr>
+        <p:xfrm>
+          <a:off x="6996283" y="221319"/>
+          <a:ext cx="2046941" cy="2556039"/>
+        </p:xfrm>
+        <a:graphic>
+          <a:graphicData uri="http://schemas.openxmlformats.org/drawingml/2006/table">
+            <a:tbl>
+              <a:tblPr firstRow="1" bandRow="1">
+                <a:tableStyleId>{5C22544A-7EE6-4342-B048-85BDC9FD1C3A}</a:tableStyleId>
+              </a:tblPr>
+              <a:tblGrid>
+                <a:gridCol w="2046941">
+                  <a:extLst>
+                    <a:ext uri="{9D8B030D-6E8A-4147-A177-3AD203B41FA5}">
+                      <a16:colId xmlns:a16="http://schemas.microsoft.com/office/drawing/2014/main" val="1198671097"/>
+                    </a:ext>
+                  </a:extLst>
+                </a:gridCol>
+              </a:tblGrid>
+              <a:tr h="544359">
+                <a:tc>
+                  <a:txBody>
+                    <a:bodyPr/>
+                    <a:lstStyle/>
+                    <a:p>
+                      <a:pPr algn="ctr" latinLnBrk="1"/>
+                      <a:r>
+                        <a:rPr lang="en-US" altLang="ko-KR" dirty="0" err="1"/>
+                        <a:t>tCommonGroup</a:t>
+                      </a:r>
+                      <a:endParaRPr lang="ko-KR" altLang="en-US" dirty="0"/>
+                    </a:p>
+                  </a:txBody>
+                  <a:tcPr anchor="ctr"/>
+                </a:tc>
+                <a:extLst>
+                  <a:ext uri="{0D108BD9-81ED-4DB2-BD59-A6C34878D82A}">
+                    <a16:rowId xmlns:a16="http://schemas.microsoft.com/office/drawing/2014/main" val="972086059"/>
+                  </a:ext>
+                </a:extLst>
+              </a:tr>
+              <a:tr h="1549650">
+                <a:tc>
+                  <a:txBody>
+                    <a:bodyPr/>
+                    <a:lstStyle/>
+                    <a:p>
+                      <a:pPr algn="l" latinLnBrk="1"/>
+                      <a:r>
+                        <a:rPr lang="en-US" altLang="ko-KR" b="1" dirty="0" err="1">
+                          <a:solidFill>
+                            <a:srgbClr val="FF0000"/>
+                          </a:solidFill>
+                        </a:rPr>
+                        <a:t>GroupIdx</a:t>
+                      </a:r>
+                      <a:endParaRPr lang="en-US" altLang="ko-KR" b="1" dirty="0">
+                        <a:solidFill>
+                          <a:srgbClr val="FF0000"/>
+                        </a:solidFill>
+                      </a:endParaRPr>
+                    </a:p>
+                    <a:p>
+                      <a:pPr algn="l" latinLnBrk="1"/>
+                      <a:r>
+                        <a:rPr lang="en-US" altLang="ko-KR" dirty="0" err="1"/>
+                        <a:t>GroupCode</a:t>
+                      </a:r>
+                      <a:endParaRPr lang="en-US" altLang="ko-KR" dirty="0"/>
+                    </a:p>
+                    <a:p>
+                      <a:pPr algn="l" latinLnBrk="1"/>
+                      <a:r>
+                        <a:rPr lang="en-US" altLang="ko-KR" dirty="0" err="1"/>
+                        <a:t>GroupCodeNm</a:t>
+                      </a:r>
+                      <a:endParaRPr lang="en-US" altLang="ko-KR" dirty="0"/>
+                    </a:p>
+                    <a:p>
+                      <a:pPr algn="l" latinLnBrk="1"/>
+                      <a:r>
+                        <a:rPr lang="en-US" altLang="ko-KR" dirty="0" err="1"/>
+                        <a:t>UseYn</a:t>
+                      </a:r>
+                      <a:endParaRPr lang="en-US" altLang="ko-KR" dirty="0"/>
+                    </a:p>
+                    <a:p>
+                      <a:pPr algn="l" latinLnBrk="1"/>
+                      <a:r>
+                        <a:rPr lang="en-US" altLang="ko-KR" dirty="0" err="1"/>
+                        <a:t>DltYn</a:t>
+                      </a:r>
+                      <a:endParaRPr lang="en-US" altLang="ko-KR" dirty="0"/>
+                    </a:p>
+                    <a:p>
+                      <a:pPr algn="l" latinLnBrk="1"/>
+                      <a:r>
+                        <a:rPr lang="en-US" altLang="ko-KR" dirty="0" err="1"/>
+                        <a:t>CrtDateTime</a:t>
+                      </a:r>
+                      <a:endParaRPr lang="en-US" altLang="ko-KR" dirty="0"/>
+                    </a:p>
+                    <a:p>
+                      <a:pPr algn="l" latinLnBrk="1"/>
+                      <a:r>
+                        <a:rPr lang="en-US" altLang="ko-KR" dirty="0" err="1"/>
+                        <a:t>UptDateTime</a:t>
+                      </a:r>
+                      <a:endParaRPr lang="en-US" altLang="ko-KR" dirty="0"/>
+                    </a:p>
+                  </a:txBody>
+                  <a:tcPr anchor="ctr"/>
+                </a:tc>
+                <a:extLst>
+                  <a:ext uri="{0D108BD9-81ED-4DB2-BD59-A6C34878D82A}">
+                    <a16:rowId xmlns:a16="http://schemas.microsoft.com/office/drawing/2014/main" val="1592556911"/>
+                  </a:ext>
+                </a:extLst>
+              </a:tr>
+            </a:tbl>
+          </a:graphicData>
+        </a:graphic>
+      </p:graphicFrame>
+      <p:graphicFrame>
+        <p:nvGraphicFramePr>
+          <p:cNvPr id="4" name="표 3">
+            <a:extLst>
+              <a:ext uri="{FF2B5EF4-FFF2-40B4-BE49-F238E27FC236}">
+                <a16:creationId xmlns:a16="http://schemas.microsoft.com/office/drawing/2014/main" id="{AA1B3509-676F-4695-BDBA-8947376E5AB6}"/>
+              </a:ext>
+            </a:extLst>
+          </p:cNvPr>
+          <p:cNvGraphicFramePr>
+            <a:graphicFrameLocks noGrp="1"/>
+          </p:cNvGraphicFramePr>
+          <p:nvPr>
+            <p:extLst>
+              <p:ext uri="{D42A27DB-BD31-4B8C-83A1-F6EECF244321}">
+                <p14:modId xmlns:p14="http://schemas.microsoft.com/office/powerpoint/2010/main" val="1043860545"/>
+              </p:ext>
+            </p:extLst>
+          </p:nvPr>
+        </p:nvGraphicFramePr>
+        <p:xfrm>
+          <a:off x="7101386" y="3134223"/>
+          <a:ext cx="2046941" cy="3378999"/>
+        </p:xfrm>
+        <a:graphic>
+          <a:graphicData uri="http://schemas.openxmlformats.org/drawingml/2006/table">
+            <a:tbl>
+              <a:tblPr firstRow="1" bandRow="1">
+                <a:tableStyleId>{5C22544A-7EE6-4342-B048-85BDC9FD1C3A}</a:tableStyleId>
+              </a:tblPr>
+              <a:tblGrid>
+                <a:gridCol w="2046941">
+                  <a:extLst>
+                    <a:ext uri="{9D8B030D-6E8A-4147-A177-3AD203B41FA5}">
+                      <a16:colId xmlns:a16="http://schemas.microsoft.com/office/drawing/2014/main" val="1198671097"/>
+                    </a:ext>
+                  </a:extLst>
+                </a:gridCol>
+              </a:tblGrid>
+              <a:tr h="544359">
+                <a:tc>
+                  <a:txBody>
+                    <a:bodyPr/>
+                    <a:lstStyle/>
+                    <a:p>
+                      <a:pPr algn="ctr" latinLnBrk="1"/>
+                      <a:r>
+                        <a:rPr lang="en-US" altLang="ko-KR" dirty="0" err="1"/>
+                        <a:t>tCommonCode</a:t>
+                      </a:r>
+                      <a:endParaRPr lang="ko-KR" altLang="en-US" dirty="0"/>
+                    </a:p>
+                  </a:txBody>
+                  <a:tcPr anchor="ctr"/>
+                </a:tc>
+                <a:extLst>
+                  <a:ext uri="{0D108BD9-81ED-4DB2-BD59-A6C34878D82A}">
+                    <a16:rowId xmlns:a16="http://schemas.microsoft.com/office/drawing/2014/main" val="972086059"/>
+                  </a:ext>
+                </a:extLst>
+              </a:tr>
+              <a:tr h="1549650">
+                <a:tc>
+                  <a:txBody>
+                    <a:bodyPr/>
+                    <a:lstStyle/>
+                    <a:p>
+                      <a:pPr algn="l" latinLnBrk="1"/>
+                      <a:r>
+                        <a:rPr lang="en-US" altLang="ko-KR" b="1" dirty="0" err="1">
+                          <a:solidFill>
+                            <a:srgbClr val="FF0000"/>
+                          </a:solidFill>
+                        </a:rPr>
+                        <a:t>CodeIdx</a:t>
+                      </a:r>
+                      <a:endParaRPr lang="en-US" altLang="ko-KR" b="1" dirty="0">
+                        <a:solidFill>
+                          <a:srgbClr val="FF0000"/>
+                        </a:solidFill>
+                      </a:endParaRPr>
+                    </a:p>
+                    <a:p>
+                      <a:pPr algn="l" latinLnBrk="1"/>
+                      <a:r>
+                        <a:rPr lang="en-US" altLang="ko-KR" b="1" dirty="0" err="1">
+                          <a:solidFill>
+                            <a:srgbClr val="0000FF"/>
+                          </a:solidFill>
+                        </a:rPr>
+                        <a:t>GroupIdx</a:t>
+                      </a:r>
+                      <a:endParaRPr lang="en-US" altLang="ko-KR" b="1" dirty="0">
+                        <a:solidFill>
+                          <a:srgbClr val="0000FF"/>
+                        </a:solidFill>
+                      </a:endParaRPr>
+                    </a:p>
+                    <a:p>
+                      <a:pPr algn="l" latinLnBrk="1"/>
+                      <a:r>
+                        <a:rPr lang="en-US" altLang="ko-KR" dirty="0" err="1"/>
+                        <a:t>GroupCode</a:t>
+                      </a:r>
+                      <a:endParaRPr lang="en-US" altLang="ko-KR" dirty="0"/>
+                    </a:p>
+                    <a:p>
+                      <a:pPr algn="l" latinLnBrk="1"/>
+                      <a:r>
+                        <a:rPr lang="en-US" altLang="ko-KR" dirty="0" err="1"/>
+                        <a:t>CommonCode</a:t>
+                      </a:r>
+                      <a:endParaRPr lang="en-US" altLang="ko-KR" dirty="0"/>
+                    </a:p>
+                    <a:p>
+                      <a:pPr algn="l" latinLnBrk="1"/>
+                      <a:r>
+                        <a:rPr lang="en-US" altLang="ko-KR" dirty="0" err="1"/>
+                        <a:t>CodeName</a:t>
+                      </a:r>
+                      <a:endParaRPr lang="en-US" altLang="ko-KR" dirty="0"/>
+                    </a:p>
+                    <a:p>
+                      <a:pPr algn="l" latinLnBrk="1"/>
+                      <a:r>
+                        <a:rPr lang="en-US" altLang="ko-KR" dirty="0" err="1"/>
+                        <a:t>DisplayOrder</a:t>
+                      </a:r>
+                      <a:endParaRPr lang="en-US" altLang="ko-KR" dirty="0"/>
+                    </a:p>
+                    <a:p>
+                      <a:pPr algn="l" latinLnBrk="1"/>
+                      <a:r>
+                        <a:rPr lang="en-US" altLang="ko-KR" dirty="0" err="1"/>
+                        <a:t>UseYn</a:t>
+                      </a:r>
+                      <a:endParaRPr lang="en-US" altLang="ko-KR" dirty="0"/>
+                    </a:p>
+                    <a:p>
+                      <a:pPr algn="l" latinLnBrk="1"/>
+                      <a:r>
+                        <a:rPr lang="en-US" altLang="ko-KR" dirty="0" err="1"/>
+                        <a:t>DltYn</a:t>
+                      </a:r>
+                      <a:endParaRPr lang="en-US" altLang="ko-KR" dirty="0"/>
+                    </a:p>
+                    <a:p>
+                      <a:pPr algn="l" latinLnBrk="1"/>
+                      <a:r>
+                        <a:rPr lang="en-US" altLang="ko-KR" dirty="0" err="1"/>
+                        <a:t>CrtDateTime</a:t>
+                      </a:r>
+                      <a:endParaRPr lang="en-US" altLang="ko-KR" dirty="0"/>
+                    </a:p>
+                    <a:p>
+                      <a:pPr algn="l" latinLnBrk="1"/>
+                      <a:r>
+                        <a:rPr lang="en-US" altLang="ko-KR" dirty="0" err="1"/>
+                        <a:t>UptDateTime</a:t>
+                      </a:r>
+                      <a:endParaRPr lang="en-US" altLang="ko-KR" dirty="0"/>
+                    </a:p>
+                  </a:txBody>
+                  <a:tcPr anchor="ctr"/>
+                </a:tc>
+                <a:extLst>
+                  <a:ext uri="{0D108BD9-81ED-4DB2-BD59-A6C34878D82A}">
+                    <a16:rowId xmlns:a16="http://schemas.microsoft.com/office/drawing/2014/main" val="1592556911"/>
+                  </a:ext>
+                </a:extLst>
+              </a:tr>
+            </a:tbl>
+          </a:graphicData>
+        </a:graphic>
+      </p:graphicFrame>
+    </p:spTree>
+    <p:extLst>
+      <p:ext uri="{BB962C8B-B14F-4D97-AF65-F5344CB8AC3E}">
+        <p14:creationId xmlns:p14="http://schemas.microsoft.com/office/powerpoint/2010/main" val="1539419287"/>
       </p:ext>
     </p:extLst>
   </p:cSld>

--- a/1.Design/jaejaePro_Design.pptx
+++ b/1.Design/jaejaePro_Design.pptx
@@ -6,8 +6,9 @@
   </p:sldMasterIdLst>
   <p:sldIdLst>
     <p:sldId id="256" r:id="rId2"/>
-    <p:sldId id="257" r:id="rId3"/>
-    <p:sldId id="258" r:id="rId4"/>
+    <p:sldId id="259" r:id="rId3"/>
+    <p:sldId id="257" r:id="rId4"/>
+    <p:sldId id="258" r:id="rId5"/>
   </p:sldIdLst>
   <p:sldSz cx="12192000" cy="6858000"/>
   <p:notesSz cx="6858000" cy="9144000"/>
@@ -261,7 +262,7 @@
           <a:p>
             <a:fld id="{367674F1-4F86-4564-9369-8E04E826D382}" type="datetimeFigureOut">
               <a:rPr lang="ko-KR" altLang="en-US" smtClean="0"/>
-              <a:t>2022-04-13</a:t>
+              <a:t>2022-04-14</a:t>
             </a:fld>
             <a:endParaRPr lang="ko-KR" altLang="en-US"/>
           </a:p>
@@ -459,7 +460,7 @@
           <a:p>
             <a:fld id="{367674F1-4F86-4564-9369-8E04E826D382}" type="datetimeFigureOut">
               <a:rPr lang="ko-KR" altLang="en-US" smtClean="0"/>
-              <a:t>2022-04-13</a:t>
+              <a:t>2022-04-14</a:t>
             </a:fld>
             <a:endParaRPr lang="ko-KR" altLang="en-US"/>
           </a:p>
@@ -667,7 +668,7 @@
           <a:p>
             <a:fld id="{367674F1-4F86-4564-9369-8E04E826D382}" type="datetimeFigureOut">
               <a:rPr lang="ko-KR" altLang="en-US" smtClean="0"/>
-              <a:t>2022-04-13</a:t>
+              <a:t>2022-04-14</a:t>
             </a:fld>
             <a:endParaRPr lang="ko-KR" altLang="en-US"/>
           </a:p>
@@ -865,7 +866,7 @@
           <a:p>
             <a:fld id="{367674F1-4F86-4564-9369-8E04E826D382}" type="datetimeFigureOut">
               <a:rPr lang="ko-KR" altLang="en-US" smtClean="0"/>
-              <a:t>2022-04-13</a:t>
+              <a:t>2022-04-14</a:t>
             </a:fld>
             <a:endParaRPr lang="ko-KR" altLang="en-US"/>
           </a:p>
@@ -1140,7 +1141,7 @@
           <a:p>
             <a:fld id="{367674F1-4F86-4564-9369-8E04E826D382}" type="datetimeFigureOut">
               <a:rPr lang="ko-KR" altLang="en-US" smtClean="0"/>
-              <a:t>2022-04-13</a:t>
+              <a:t>2022-04-14</a:t>
             </a:fld>
             <a:endParaRPr lang="ko-KR" altLang="en-US"/>
           </a:p>
@@ -1405,7 +1406,7 @@
           <a:p>
             <a:fld id="{367674F1-4F86-4564-9369-8E04E826D382}" type="datetimeFigureOut">
               <a:rPr lang="ko-KR" altLang="en-US" smtClean="0"/>
-              <a:t>2022-04-13</a:t>
+              <a:t>2022-04-14</a:t>
             </a:fld>
             <a:endParaRPr lang="ko-KR" altLang="en-US"/>
           </a:p>
@@ -1817,7 +1818,7 @@
           <a:p>
             <a:fld id="{367674F1-4F86-4564-9369-8E04E826D382}" type="datetimeFigureOut">
               <a:rPr lang="ko-KR" altLang="en-US" smtClean="0"/>
-              <a:t>2022-04-13</a:t>
+              <a:t>2022-04-14</a:t>
             </a:fld>
             <a:endParaRPr lang="ko-KR" altLang="en-US"/>
           </a:p>
@@ -1958,7 +1959,7 @@
           <a:p>
             <a:fld id="{367674F1-4F86-4564-9369-8E04E826D382}" type="datetimeFigureOut">
               <a:rPr lang="ko-KR" altLang="en-US" smtClean="0"/>
-              <a:t>2022-04-13</a:t>
+              <a:t>2022-04-14</a:t>
             </a:fld>
             <a:endParaRPr lang="ko-KR" altLang="en-US"/>
           </a:p>
@@ -2071,7 +2072,7 @@
           <a:p>
             <a:fld id="{367674F1-4F86-4564-9369-8E04E826D382}" type="datetimeFigureOut">
               <a:rPr lang="ko-KR" altLang="en-US" smtClean="0"/>
-              <a:t>2022-04-13</a:t>
+              <a:t>2022-04-14</a:t>
             </a:fld>
             <a:endParaRPr lang="ko-KR" altLang="en-US"/>
           </a:p>
@@ -2382,7 +2383,7 @@
           <a:p>
             <a:fld id="{367674F1-4F86-4564-9369-8E04E826D382}" type="datetimeFigureOut">
               <a:rPr lang="ko-KR" altLang="en-US" smtClean="0"/>
-              <a:t>2022-04-13</a:t>
+              <a:t>2022-04-14</a:t>
             </a:fld>
             <a:endParaRPr lang="ko-KR" altLang="en-US"/>
           </a:p>
@@ -2670,7 +2671,7 @@
           <a:p>
             <a:fld id="{367674F1-4F86-4564-9369-8E04E826D382}" type="datetimeFigureOut">
               <a:rPr lang="ko-KR" altLang="en-US" smtClean="0"/>
-              <a:t>2022-04-13</a:t>
+              <a:t>2022-04-14</a:t>
             </a:fld>
             <a:endParaRPr lang="ko-KR" altLang="en-US"/>
           </a:p>
@@ -2911,7 +2912,7 @@
           <a:p>
             <a:fld id="{367674F1-4F86-4564-9369-8E04E826D382}" type="datetimeFigureOut">
               <a:rPr lang="ko-KR" altLang="en-US" smtClean="0"/>
-              <a:t>2022-04-13</a:t>
+              <a:t>2022-04-14</a:t>
             </a:fld>
             <a:endParaRPr lang="ko-KR" altLang="en-US"/>
           </a:p>
@@ -3848,6 +3849,547 @@
           <a:chExt cx="0" cy="0"/>
         </a:xfrm>
       </p:grpSpPr>
+      <p:sp>
+        <p:nvSpPr>
+          <p:cNvPr id="4" name="원통형 3">
+            <a:extLst>
+              <a:ext uri="{FF2B5EF4-FFF2-40B4-BE49-F238E27FC236}">
+                <a16:creationId xmlns:a16="http://schemas.microsoft.com/office/drawing/2014/main" id="{974FB5FE-7D6A-44E7-B3D1-C0B9DA3CAF02}"/>
+              </a:ext>
+            </a:extLst>
+          </p:cNvPr>
+          <p:cNvSpPr/>
+          <p:nvPr/>
+        </p:nvSpPr>
+        <p:spPr>
+          <a:xfrm>
+            <a:off x="9499583" y="2137186"/>
+            <a:ext cx="2289936" cy="2002285"/>
+          </a:xfrm>
+          <a:prstGeom prst="can">
+            <a:avLst/>
+          </a:prstGeom>
+          <a:solidFill>
+            <a:schemeClr val="accent4">
+              <a:lumMod val="40000"/>
+              <a:lumOff val="60000"/>
+            </a:schemeClr>
+          </a:solidFill>
+        </p:spPr>
+        <p:style>
+          <a:lnRef idx="2">
+            <a:schemeClr val="accent1">
+              <a:shade val="50000"/>
+            </a:schemeClr>
+          </a:lnRef>
+          <a:fillRef idx="1">
+            <a:schemeClr val="accent1"/>
+          </a:fillRef>
+          <a:effectRef idx="0">
+            <a:schemeClr val="accent1"/>
+          </a:effectRef>
+          <a:fontRef idx="minor">
+            <a:schemeClr val="lt1"/>
+          </a:fontRef>
+        </p:style>
+        <p:txBody>
+          <a:bodyPr rtlCol="0" anchor="ctr"/>
+          <a:lstStyle/>
+          <a:p>
+            <a:pPr algn="ctr"/>
+            <a:r>
+              <a:rPr lang="ko-KR" altLang="en-US" dirty="0">
+                <a:solidFill>
+                  <a:schemeClr val="tx1"/>
+                </a:solidFill>
+              </a:rPr>
+              <a:t>데이터 베이스</a:t>
+            </a:r>
+          </a:p>
+        </p:txBody>
+      </p:sp>
+      <p:grpSp>
+        <p:nvGrpSpPr>
+          <p:cNvPr id="10" name="그룹 9">
+            <a:extLst>
+              <a:ext uri="{FF2B5EF4-FFF2-40B4-BE49-F238E27FC236}">
+                <a16:creationId xmlns:a16="http://schemas.microsoft.com/office/drawing/2014/main" id="{C96FF5B2-050B-43E1-9E1B-34BD4FFC68A1}"/>
+              </a:ext>
+            </a:extLst>
+          </p:cNvPr>
+          <p:cNvGrpSpPr/>
+          <p:nvPr/>
+        </p:nvGrpSpPr>
+        <p:grpSpPr>
+          <a:xfrm>
+            <a:off x="288715" y="2284339"/>
+            <a:ext cx="1889710" cy="1766047"/>
+            <a:chOff x="116911" y="1432441"/>
+            <a:chExt cx="2415435" cy="2862957"/>
+          </a:xfrm>
+        </p:grpSpPr>
+        <p:pic>
+          <p:nvPicPr>
+            <p:cNvPr id="7" name="그래픽 6" descr="여성 프로그래머 단색으로 채워진">
+              <a:extLst>
+                <a:ext uri="{FF2B5EF4-FFF2-40B4-BE49-F238E27FC236}">
+                  <a16:creationId xmlns:a16="http://schemas.microsoft.com/office/drawing/2014/main" id="{769A5C18-E142-4DF3-B17F-34320BC31A97}"/>
+                </a:ext>
+              </a:extLst>
+            </p:cNvPr>
+            <p:cNvPicPr>
+              <a:picLocks noChangeAspect="1"/>
+            </p:cNvPicPr>
+            <p:nvPr/>
+          </p:nvPicPr>
+          <p:blipFill>
+            <a:blip r:embed="rId2">
+              <a:extLst>
+                <a:ext uri="{28A0092B-C50C-407E-A947-70E740481C1C}">
+                  <a14:useLocalDpi xmlns:a14="http://schemas.microsoft.com/office/drawing/2010/main" val="0"/>
+                </a:ext>
+                <a:ext uri="{96DAC541-7B7A-43D3-8B79-37D633B846F1}">
+                  <asvg:svgBlip xmlns:asvg="http://schemas.microsoft.com/office/drawing/2016/SVG/main" r:embed="rId3"/>
+                </a:ext>
+              </a:extLst>
+            </a:blip>
+            <a:stretch>
+              <a:fillRect/>
+            </a:stretch>
+          </p:blipFill>
+          <p:spPr>
+            <a:xfrm>
+              <a:off x="388309" y="1432441"/>
+              <a:ext cx="1528174" cy="1387481"/>
+            </a:xfrm>
+            <a:prstGeom prst="rect">
+              <a:avLst/>
+            </a:prstGeom>
+          </p:spPr>
+        </p:pic>
+        <p:pic>
+          <p:nvPicPr>
+            <p:cNvPr id="8" name="그래픽 7" descr="여성 프로그래머 단색으로 채워진">
+              <a:extLst>
+                <a:ext uri="{FF2B5EF4-FFF2-40B4-BE49-F238E27FC236}">
+                  <a16:creationId xmlns:a16="http://schemas.microsoft.com/office/drawing/2014/main" id="{03F6CEC8-BB7A-423A-B7C0-004384AB3D79}"/>
+                </a:ext>
+              </a:extLst>
+            </p:cNvPr>
+            <p:cNvPicPr>
+              <a:picLocks noChangeAspect="1"/>
+            </p:cNvPicPr>
+            <p:nvPr/>
+          </p:nvPicPr>
+          <p:blipFill>
+            <a:blip r:embed="rId2">
+              <a:extLst>
+                <a:ext uri="{28A0092B-C50C-407E-A947-70E740481C1C}">
+                  <a14:useLocalDpi xmlns:a14="http://schemas.microsoft.com/office/drawing/2010/main" val="0"/>
+                </a:ext>
+                <a:ext uri="{96DAC541-7B7A-43D3-8B79-37D633B846F1}">
+                  <asvg:svgBlip xmlns:asvg="http://schemas.microsoft.com/office/drawing/2016/SVG/main" r:embed="rId3"/>
+                </a:ext>
+              </a:extLst>
+            </a:blip>
+            <a:stretch>
+              <a:fillRect/>
+            </a:stretch>
+          </p:blipFill>
+          <p:spPr>
+            <a:xfrm>
+              <a:off x="1004172" y="2436088"/>
+              <a:ext cx="1528174" cy="1387481"/>
+            </a:xfrm>
+            <a:prstGeom prst="rect">
+              <a:avLst/>
+            </a:prstGeom>
+          </p:spPr>
+        </p:pic>
+        <p:pic>
+          <p:nvPicPr>
+            <p:cNvPr id="9" name="그래픽 8" descr="여성 프로그래머 단색으로 채워진">
+              <a:extLst>
+                <a:ext uri="{FF2B5EF4-FFF2-40B4-BE49-F238E27FC236}">
+                  <a16:creationId xmlns:a16="http://schemas.microsoft.com/office/drawing/2014/main" id="{E47C28B1-3CC6-4029-B84B-0843D0766FE2}"/>
+                </a:ext>
+              </a:extLst>
+            </p:cNvPr>
+            <p:cNvPicPr>
+              <a:picLocks noChangeAspect="1"/>
+            </p:cNvPicPr>
+            <p:nvPr/>
+          </p:nvPicPr>
+          <p:blipFill>
+            <a:blip r:embed="rId2">
+              <a:extLst>
+                <a:ext uri="{28A0092B-C50C-407E-A947-70E740481C1C}">
+                  <a14:useLocalDpi xmlns:a14="http://schemas.microsoft.com/office/drawing/2010/main" val="0"/>
+                </a:ext>
+                <a:ext uri="{96DAC541-7B7A-43D3-8B79-37D633B846F1}">
+                  <asvg:svgBlip xmlns:asvg="http://schemas.microsoft.com/office/drawing/2016/SVG/main" r:embed="rId3"/>
+                </a:ext>
+              </a:extLst>
+            </a:blip>
+            <a:stretch>
+              <a:fillRect/>
+            </a:stretch>
+          </p:blipFill>
+          <p:spPr>
+            <a:xfrm>
+              <a:off x="116911" y="2907917"/>
+              <a:ext cx="1528174" cy="1387481"/>
+            </a:xfrm>
+            <a:prstGeom prst="rect">
+              <a:avLst/>
+            </a:prstGeom>
+          </p:spPr>
+        </p:pic>
+      </p:grpSp>
+      <p:grpSp>
+        <p:nvGrpSpPr>
+          <p:cNvPr id="6" name="그룹 5">
+            <a:extLst>
+              <a:ext uri="{FF2B5EF4-FFF2-40B4-BE49-F238E27FC236}">
+                <a16:creationId xmlns:a16="http://schemas.microsoft.com/office/drawing/2014/main" id="{ACABF87C-0037-4CB2-8DC1-712A8CD97AA1}"/>
+              </a:ext>
+            </a:extLst>
+          </p:cNvPr>
+          <p:cNvGrpSpPr/>
+          <p:nvPr/>
+        </p:nvGrpSpPr>
+        <p:grpSpPr>
+          <a:xfrm>
+            <a:off x="2124119" y="263413"/>
+            <a:ext cx="5862181" cy="5862180"/>
+            <a:chOff x="2871711" y="302504"/>
+            <a:chExt cx="5862181" cy="5862180"/>
+          </a:xfrm>
+        </p:grpSpPr>
+        <p:grpSp>
+          <p:nvGrpSpPr>
+            <p:cNvPr id="5" name="그룹 4">
+              <a:extLst>
+                <a:ext uri="{FF2B5EF4-FFF2-40B4-BE49-F238E27FC236}">
+                  <a16:creationId xmlns:a16="http://schemas.microsoft.com/office/drawing/2014/main" id="{6D4F32EE-FD4A-4346-94B4-D0A0484C68C2}"/>
+                </a:ext>
+              </a:extLst>
+            </p:cNvPr>
+            <p:cNvGrpSpPr/>
+            <p:nvPr/>
+          </p:nvGrpSpPr>
+          <p:grpSpPr>
+            <a:xfrm>
+              <a:off x="2871711" y="302504"/>
+              <a:ext cx="5862181" cy="5862180"/>
+              <a:chOff x="2871711" y="302504"/>
+              <a:chExt cx="5862181" cy="5862180"/>
+            </a:xfrm>
+            <a:noFill/>
+          </p:grpSpPr>
+          <p:sp>
+            <p:nvSpPr>
+              <p:cNvPr id="2" name="직사각형 1">
+                <a:extLst>
+                  <a:ext uri="{FF2B5EF4-FFF2-40B4-BE49-F238E27FC236}">
+                    <a16:creationId xmlns:a16="http://schemas.microsoft.com/office/drawing/2014/main" id="{5B2320AC-0A43-45BE-A9EF-7510DC389D9C}"/>
+                  </a:ext>
+                </a:extLst>
+              </p:cNvPr>
+              <p:cNvSpPr/>
+              <p:nvPr/>
+            </p:nvSpPr>
+            <p:spPr>
+              <a:xfrm>
+                <a:off x="2871711" y="302504"/>
+                <a:ext cx="5862181" cy="5862180"/>
+              </a:xfrm>
+              <a:prstGeom prst="rect">
+                <a:avLst/>
+              </a:prstGeom>
+              <a:grpFill/>
+            </p:spPr>
+            <p:style>
+              <a:lnRef idx="2">
+                <a:schemeClr val="accent1">
+                  <a:shade val="50000"/>
+                </a:schemeClr>
+              </a:lnRef>
+              <a:fillRef idx="1">
+                <a:schemeClr val="accent1"/>
+              </a:fillRef>
+              <a:effectRef idx="0">
+                <a:schemeClr val="accent1"/>
+              </a:effectRef>
+              <a:fontRef idx="minor">
+                <a:schemeClr val="lt1"/>
+              </a:fontRef>
+            </p:style>
+            <p:txBody>
+              <a:bodyPr rtlCol="0" anchor="ctr"/>
+              <a:lstStyle/>
+              <a:p>
+                <a:pPr algn="ctr"/>
+                <a:endParaRPr lang="ko-KR" altLang="en-US" dirty="0"/>
+              </a:p>
+            </p:txBody>
+          </p:sp>
+          <p:sp>
+            <p:nvSpPr>
+              <p:cNvPr id="3" name="직사각형 2">
+                <a:extLst>
+                  <a:ext uri="{FF2B5EF4-FFF2-40B4-BE49-F238E27FC236}">
+                    <a16:creationId xmlns:a16="http://schemas.microsoft.com/office/drawing/2014/main" id="{0A709DD3-B1BF-4B2A-B6C7-AA8DFAA6741E}"/>
+                  </a:ext>
+                </a:extLst>
+              </p:cNvPr>
+              <p:cNvSpPr/>
+              <p:nvPr/>
+            </p:nvSpPr>
+            <p:spPr>
+              <a:xfrm>
+                <a:off x="3143109" y="1093716"/>
+                <a:ext cx="5187743" cy="663879"/>
+              </a:xfrm>
+              <a:prstGeom prst="rect">
+                <a:avLst/>
+              </a:prstGeom>
+              <a:solidFill>
+                <a:schemeClr val="accent2">
+                  <a:lumMod val="60000"/>
+                  <a:lumOff val="40000"/>
+                </a:schemeClr>
+              </a:solidFill>
+            </p:spPr>
+            <p:style>
+              <a:lnRef idx="2">
+                <a:schemeClr val="accent1">
+                  <a:shade val="50000"/>
+                </a:schemeClr>
+              </a:lnRef>
+              <a:fillRef idx="1">
+                <a:schemeClr val="accent1"/>
+              </a:fillRef>
+              <a:effectRef idx="0">
+                <a:schemeClr val="accent1"/>
+              </a:effectRef>
+              <a:fontRef idx="minor">
+                <a:schemeClr val="lt1"/>
+              </a:fontRef>
+            </p:style>
+            <p:txBody>
+              <a:bodyPr rtlCol="0" anchor="ctr"/>
+              <a:lstStyle/>
+              <a:p>
+                <a:pPr algn="ctr"/>
+                <a:r>
+                  <a:rPr lang="en-US" altLang="ko-KR" dirty="0"/>
+                  <a:t>Controller</a:t>
+                </a:r>
+                <a:endParaRPr lang="ko-KR" altLang="en-US" dirty="0"/>
+              </a:p>
+            </p:txBody>
+          </p:sp>
+          <p:sp>
+            <p:nvSpPr>
+              <p:cNvPr id="11" name="직사각형 10">
+                <a:extLst>
+                  <a:ext uri="{FF2B5EF4-FFF2-40B4-BE49-F238E27FC236}">
+                    <a16:creationId xmlns:a16="http://schemas.microsoft.com/office/drawing/2014/main" id="{F8E6F123-9383-4052-9983-69AC05CE6A18}"/>
+                  </a:ext>
+                </a:extLst>
+              </p:cNvPr>
+              <p:cNvSpPr/>
+              <p:nvPr/>
+            </p:nvSpPr>
+            <p:spPr>
+              <a:xfrm>
+                <a:off x="3143109" y="2097886"/>
+                <a:ext cx="5187743" cy="663879"/>
+              </a:xfrm>
+              <a:prstGeom prst="rect">
+                <a:avLst/>
+              </a:prstGeom>
+              <a:solidFill>
+                <a:schemeClr val="accent2">
+                  <a:lumMod val="60000"/>
+                  <a:lumOff val="40000"/>
+                </a:schemeClr>
+              </a:solidFill>
+            </p:spPr>
+            <p:style>
+              <a:lnRef idx="2">
+                <a:schemeClr val="accent1">
+                  <a:shade val="50000"/>
+                </a:schemeClr>
+              </a:lnRef>
+              <a:fillRef idx="1">
+                <a:schemeClr val="accent1"/>
+              </a:fillRef>
+              <a:effectRef idx="0">
+                <a:schemeClr val="accent1"/>
+              </a:effectRef>
+              <a:fontRef idx="minor">
+                <a:schemeClr val="lt1"/>
+              </a:fontRef>
+            </p:style>
+            <p:txBody>
+              <a:bodyPr rtlCol="0" anchor="ctr"/>
+              <a:lstStyle/>
+              <a:p>
+                <a:pPr algn="ctr"/>
+                <a:r>
+                  <a:rPr lang="en-US" altLang="ko-KR" dirty="0"/>
+                  <a:t>Interface</a:t>
+                </a:r>
+                <a:endParaRPr lang="ko-KR" altLang="en-US" dirty="0"/>
+              </a:p>
+            </p:txBody>
+          </p:sp>
+          <p:sp>
+            <p:nvSpPr>
+              <p:cNvPr id="12" name="직사각형 11">
+                <a:extLst>
+                  <a:ext uri="{FF2B5EF4-FFF2-40B4-BE49-F238E27FC236}">
+                    <a16:creationId xmlns:a16="http://schemas.microsoft.com/office/drawing/2014/main" id="{832F504D-980F-49B5-A436-B195870EAD10}"/>
+                  </a:ext>
+                </a:extLst>
+              </p:cNvPr>
+              <p:cNvSpPr/>
+              <p:nvPr/>
+            </p:nvSpPr>
+            <p:spPr>
+              <a:xfrm>
+                <a:off x="3143109" y="3177420"/>
+                <a:ext cx="5187743" cy="663879"/>
+              </a:xfrm>
+              <a:prstGeom prst="rect">
+                <a:avLst/>
+              </a:prstGeom>
+              <a:solidFill>
+                <a:schemeClr val="accent2">
+                  <a:lumMod val="60000"/>
+                  <a:lumOff val="40000"/>
+                </a:schemeClr>
+              </a:solidFill>
+            </p:spPr>
+            <p:style>
+              <a:lnRef idx="2">
+                <a:schemeClr val="accent1">
+                  <a:shade val="50000"/>
+                </a:schemeClr>
+              </a:lnRef>
+              <a:fillRef idx="1">
+                <a:schemeClr val="accent1"/>
+              </a:fillRef>
+              <a:effectRef idx="0">
+                <a:schemeClr val="accent1"/>
+              </a:effectRef>
+              <a:fontRef idx="minor">
+                <a:schemeClr val="lt1"/>
+              </a:fontRef>
+            </p:style>
+            <p:txBody>
+              <a:bodyPr rtlCol="0" anchor="ctr"/>
+              <a:lstStyle/>
+              <a:p>
+                <a:pPr algn="ctr"/>
+                <a:r>
+                  <a:rPr lang="en-US" altLang="ko-KR" dirty="0"/>
+                  <a:t>Service</a:t>
+                </a:r>
+                <a:endParaRPr lang="ko-KR" altLang="en-US" dirty="0"/>
+              </a:p>
+            </p:txBody>
+          </p:sp>
+        </p:grpSp>
+        <p:sp>
+          <p:nvSpPr>
+            <p:cNvPr id="20" name="직사각형 19">
+              <a:extLst>
+                <a:ext uri="{FF2B5EF4-FFF2-40B4-BE49-F238E27FC236}">
+                  <a16:creationId xmlns:a16="http://schemas.microsoft.com/office/drawing/2014/main" id="{3FD9B67A-BA17-4BC0-8831-1513B84D9C8B}"/>
+                </a:ext>
+              </a:extLst>
+            </p:cNvPr>
+            <p:cNvSpPr/>
+            <p:nvPr/>
+          </p:nvSpPr>
+          <p:spPr>
+            <a:xfrm>
+              <a:off x="3208929" y="4898643"/>
+              <a:ext cx="5187743" cy="663879"/>
+            </a:xfrm>
+            <a:prstGeom prst="rect">
+              <a:avLst/>
+            </a:prstGeom>
+            <a:solidFill>
+              <a:schemeClr val="accent2">
+                <a:lumMod val="60000"/>
+                <a:lumOff val="40000"/>
+              </a:schemeClr>
+            </a:solidFill>
+          </p:spPr>
+          <p:style>
+            <a:lnRef idx="2">
+              <a:schemeClr val="accent1">
+                <a:shade val="50000"/>
+              </a:schemeClr>
+            </a:lnRef>
+            <a:fillRef idx="1">
+              <a:schemeClr val="accent1"/>
+            </a:fillRef>
+            <a:effectRef idx="0">
+              <a:schemeClr val="accent1"/>
+            </a:effectRef>
+            <a:fontRef idx="minor">
+              <a:schemeClr val="lt1"/>
+            </a:fontRef>
+          </p:style>
+          <p:txBody>
+            <a:bodyPr rtlCol="0" anchor="ctr"/>
+            <a:lstStyle/>
+            <a:p>
+              <a:pPr algn="ctr"/>
+              <a:r>
+                <a:rPr lang="en-US" altLang="ko-KR" dirty="0"/>
+                <a:t>DB Context</a:t>
+              </a:r>
+              <a:endParaRPr lang="ko-KR" altLang="en-US" dirty="0"/>
+            </a:p>
+          </p:txBody>
+        </p:sp>
+      </p:grpSp>
+    </p:spTree>
+    <p:extLst>
+      <p:ext uri="{BB962C8B-B14F-4D97-AF65-F5344CB8AC3E}">
+        <p14:creationId xmlns:p14="http://schemas.microsoft.com/office/powerpoint/2010/main" val="3538534090"/>
+      </p:ext>
+    </p:extLst>
+  </p:cSld>
+  <p:clrMapOvr>
+    <a:masterClrMapping/>
+  </p:clrMapOvr>
+</p:sld>
+</file>
+
+<file path=ppt/slides/slide3.xml><?xml version="1.0" encoding="utf-8"?>
+<p:sld xmlns:a="http://schemas.openxmlformats.org/drawingml/2006/main" xmlns:r="http://schemas.openxmlformats.org/officeDocument/2006/relationships" xmlns:p="http://schemas.openxmlformats.org/presentationml/2006/main">
+  <p:cSld>
+    <p:spTree>
+      <p:nvGrpSpPr>
+        <p:cNvPr id="1" name=""/>
+        <p:cNvGrpSpPr/>
+        <p:nvPr/>
+      </p:nvGrpSpPr>
+      <p:grpSpPr>
+        <a:xfrm>
+          <a:off x="0" y="0"/>
+          <a:ext cx="0" cy="0"/>
+          <a:chOff x="0" y="0"/>
+          <a:chExt cx="0" cy="0"/>
+        </a:xfrm>
+      </p:grpSpPr>
       <p:pic>
         <p:nvPicPr>
           <p:cNvPr id="3" name="그래픽 2" descr="세계 단색으로 채워진">
@@ -4217,7 +4759,7 @@
 </p:sld>
 </file>
 
-<file path=ppt/slides/slide3.xml><?xml version="1.0" encoding="utf-8"?>
+<file path=ppt/slides/slide4.xml><?xml version="1.0" encoding="utf-8"?>
 <p:sld xmlns:a="http://schemas.openxmlformats.org/drawingml/2006/main" xmlns:r="http://schemas.openxmlformats.org/officeDocument/2006/relationships" xmlns:p="http://schemas.openxmlformats.org/presentationml/2006/main">
   <p:cSld>
     <p:spTree>
